--- a/materials/08_계획서_통계로_PPT만들기/정답_예시/정답_동아리_결과발표.pptx
+++ b/materials/08_계획서_통계로_PPT만들기/정답_예시/정답_동아리_결과발표.pptx
@@ -4544,7 +4544,7 @@
                 <a:ea typeface="맑은 고딕"/>
                 <a:cs typeface="맑은 고딕"/>
               </a:rPr>
-              <a:t>오현초등학교 과학진로부 · 홍길동 · 마이크로비트 방과후 동아리</a:t>
+              <a:t>오현초등학교 과학진로부 · 오태민 · 마이크로비트 방과후 동아리</a:t>
             </a:r>
           </a:p>
         </p:txBody>
